--- a/docs/test/stress/e2e-outputs/income_8photos_pr10.pptx
+++ b/docs/test/stress/e2e-outputs/income_8photos_pr10.pptx
@@ -2315,7 +2315,7 @@
         <p:spPr>
           <a:xfrm>
             <a:off x="502920" y="3090672"/>
-            <a:ext cx="7315200" cy="365760"/>
+            <a:ext cx="7315200" cy="329184"/>
           </a:xfrm>
           <a:prstGeom prst="rect">
             <a:avLst/>
@@ -2353,7 +2353,7 @@
         </p:nvSpPr>
         <p:spPr>
           <a:xfrm>
-            <a:off x="502920" y="3685032"/>
+            <a:off x="502920" y="3639312"/>
             <a:ext cx="1097280" cy="292608"/>
           </a:xfrm>
           <a:prstGeom prst="roundRect">
@@ -2375,7 +2375,7 @@
         </p:nvSpPr>
         <p:spPr>
           <a:xfrm>
-            <a:off x="502920" y="3685032"/>
+            <a:off x="502920" y="3639312"/>
             <a:ext cx="1097280" cy="292608"/>
           </a:xfrm>
           <a:prstGeom prst="rect">
@@ -2414,7 +2414,7 @@
         </p:nvSpPr>
         <p:spPr>
           <a:xfrm>
-            <a:off x="1691640" y="3685032"/>
+            <a:off x="1691640" y="3639312"/>
             <a:ext cx="1005840" cy="292608"/>
           </a:xfrm>
           <a:prstGeom prst="roundRect">
@@ -2436,7 +2436,7 @@
         </p:nvSpPr>
         <p:spPr>
           <a:xfrm>
-            <a:off x="1691640" y="3685032"/>
+            <a:off x="1691640" y="3639312"/>
             <a:ext cx="1005840" cy="292608"/>
           </a:xfrm>
           <a:prstGeom prst="rect">
@@ -2475,7 +2475,7 @@
         </p:nvSpPr>
         <p:spPr>
           <a:xfrm>
-            <a:off x="502920" y="4187952"/>
+            <a:off x="502920" y="4078224"/>
             <a:ext cx="6858000" cy="1051560"/>
           </a:xfrm>
           <a:prstGeom prst="roundRect">
@@ -2502,7 +2502,7 @@
         </p:nvSpPr>
         <p:spPr>
           <a:xfrm>
-            <a:off x="758952" y="4297680"/>
+            <a:off x="758952" y="4187952"/>
             <a:ext cx="6345936" cy="832104"/>
           </a:xfrm>
           <a:prstGeom prst="rect">
@@ -2594,7 +2594,7 @@
                 <a:ea typeface="Pretendard" pitchFamily="34" charset="-122"/>
                 <a:cs typeface="Pretendard" pitchFamily="34" charset="-120"/>
               </a:rPr>
-              <a:t>크리딜   |   </a:t>
+              <a:t>크리딜</a:t>
             </a:r>
             <a:endParaRPr lang="en-US" sz="800" dirty="0"/>
           </a:p>
@@ -2949,7 +2949,7 @@
                 <a:ea typeface="Pretendard" pitchFamily="34" charset="-122"/>
                 <a:cs typeface="Pretendard" pitchFamily="34" charset="-120"/>
               </a:rPr>
-              <a:t>크리딜   |   </a:t>
+              <a:t>크리딜</a:t>
             </a:r>
             <a:endParaRPr lang="en-US" sz="800" dirty="0"/>
           </a:p>
@@ -3606,7 +3606,7 @@
                 <a:ea typeface="Pretendard" pitchFamily="34" charset="-122"/>
                 <a:cs typeface="Pretendard" pitchFamily="34" charset="-120"/>
               </a:rPr>
-              <a:t>크리딜   |   </a:t>
+              <a:t>크리딜</a:t>
             </a:r>
             <a:endParaRPr lang="en-US" sz="800" dirty="0"/>
           </a:p>
@@ -3868,7 +3868,7 @@
         <p:spPr>
           <a:xfrm>
             <a:off x="502920" y="1719072"/>
-            <a:ext cx="5368900" cy="868680"/>
+            <a:ext cx="5368900" cy="749808"/>
           </a:xfrm>
           <a:prstGeom prst="rect">
             <a:avLst/>
@@ -3892,8 +3892,8 @@
         </p:nvSpPr>
         <p:spPr>
           <a:xfrm>
-            <a:off x="640080" y="1883664"/>
-            <a:ext cx="320040" cy="320040"/>
+            <a:off x="640080" y="1947672"/>
+            <a:ext cx="292608" cy="292608"/>
           </a:xfrm>
           <a:prstGeom prst="rect">
             <a:avLst/>
@@ -3912,8 +3912,8 @@
         </p:nvSpPr>
         <p:spPr>
           <a:xfrm>
-            <a:off x="640080" y="1883664"/>
-            <a:ext cx="320040" cy="320040"/>
+            <a:off x="640080" y="1947672"/>
+            <a:ext cx="292608" cy="292608"/>
           </a:xfrm>
           <a:prstGeom prst="rect">
             <a:avLst/>
@@ -3929,7 +3929,7 @@
               <a:buNone/>
             </a:pPr>
             <a:r>
-              <a:rPr lang="en-US" sz="1100" b="1" dirty="0">
+              <a:rPr lang="en-US" sz="1050" b="1" dirty="0">
                 <a:solidFill>
                   <a:srgbClr val="FFFFFF"/>
                 </a:solidFill>
@@ -3939,7 +3939,7 @@
               </a:rPr>
               <a:t>✓</a:t>
             </a:r>
-            <a:endParaRPr lang="en-US" sz="1100" dirty="0"/>
+            <a:endParaRPr lang="en-US" sz="1050" dirty="0"/>
           </a:p>
         </p:txBody>
       </p:sp>
@@ -3951,8 +3951,8 @@
         </p:nvSpPr>
         <p:spPr>
           <a:xfrm>
-            <a:off x="1051560" y="1810512"/>
-            <a:ext cx="4683100" cy="722376"/>
+            <a:off x="1033272" y="1792224"/>
+            <a:ext cx="4710532" cy="603504"/>
           </a:xfrm>
           <a:prstGeom prst="rect">
             <a:avLst/>
@@ -3993,8 +3993,8 @@
         </p:nvSpPr>
         <p:spPr>
           <a:xfrm>
-            <a:off x="502920" y="2715768"/>
-            <a:ext cx="5368900" cy="868680"/>
+            <a:off x="502920" y="2542032"/>
+            <a:ext cx="5368900" cy="749808"/>
           </a:xfrm>
           <a:prstGeom prst="rect">
             <a:avLst/>
@@ -4018,8 +4018,8 @@
         </p:nvSpPr>
         <p:spPr>
           <a:xfrm>
-            <a:off x="640080" y="2880360"/>
-            <a:ext cx="320040" cy="320040"/>
+            <a:off x="640080" y="2770632"/>
+            <a:ext cx="292608" cy="292608"/>
           </a:xfrm>
           <a:prstGeom prst="rect">
             <a:avLst/>
@@ -4038,8 +4038,8 @@
         </p:nvSpPr>
         <p:spPr>
           <a:xfrm>
-            <a:off x="640080" y="2880360"/>
-            <a:ext cx="320040" cy="320040"/>
+            <a:off x="640080" y="2770632"/>
+            <a:ext cx="292608" cy="292608"/>
           </a:xfrm>
           <a:prstGeom prst="rect">
             <a:avLst/>
@@ -4055,7 +4055,7 @@
               <a:buNone/>
             </a:pPr>
             <a:r>
-              <a:rPr lang="en-US" sz="1100" b="1" dirty="0">
+              <a:rPr lang="en-US" sz="1050" b="1" dirty="0">
                 <a:solidFill>
                   <a:srgbClr val="FFFFFF"/>
                 </a:solidFill>
@@ -4065,7 +4065,7 @@
               </a:rPr>
               <a:t>✓</a:t>
             </a:r>
-            <a:endParaRPr lang="en-US" sz="1100" dirty="0"/>
+            <a:endParaRPr lang="en-US" sz="1050" dirty="0"/>
           </a:p>
         </p:txBody>
       </p:sp>
@@ -4077,8 +4077,8 @@
         </p:nvSpPr>
         <p:spPr>
           <a:xfrm>
-            <a:off x="1051560" y="2807208"/>
-            <a:ext cx="4683100" cy="722376"/>
+            <a:off x="1033272" y="2615184"/>
+            <a:ext cx="4710532" cy="603504"/>
           </a:xfrm>
           <a:prstGeom prst="rect">
             <a:avLst/>
@@ -4119,8 +4119,8 @@
         </p:nvSpPr>
         <p:spPr>
           <a:xfrm>
-            <a:off x="502920" y="3712464"/>
-            <a:ext cx="5368900" cy="868680"/>
+            <a:off x="502920" y="3364992"/>
+            <a:ext cx="5368900" cy="749808"/>
           </a:xfrm>
           <a:prstGeom prst="rect">
             <a:avLst/>
@@ -4144,8 +4144,8 @@
         </p:nvSpPr>
         <p:spPr>
           <a:xfrm>
-            <a:off x="640080" y="3877056"/>
-            <a:ext cx="320040" cy="320040"/>
+            <a:off x="640080" y="3593592"/>
+            <a:ext cx="292608" cy="292608"/>
           </a:xfrm>
           <a:prstGeom prst="rect">
             <a:avLst/>
@@ -4164,8 +4164,8 @@
         </p:nvSpPr>
         <p:spPr>
           <a:xfrm>
-            <a:off x="640080" y="3877056"/>
-            <a:ext cx="320040" cy="320040"/>
+            <a:off x="640080" y="3593592"/>
+            <a:ext cx="292608" cy="292608"/>
           </a:xfrm>
           <a:prstGeom prst="rect">
             <a:avLst/>
@@ -4181,7 +4181,7 @@
               <a:buNone/>
             </a:pPr>
             <a:r>
-              <a:rPr lang="en-US" sz="1100" b="1" dirty="0">
+              <a:rPr lang="en-US" sz="1050" b="1" dirty="0">
                 <a:solidFill>
                   <a:srgbClr val="FFFFFF"/>
                 </a:solidFill>
@@ -4191,7 +4191,7 @@
               </a:rPr>
               <a:t>✓</a:t>
             </a:r>
-            <a:endParaRPr lang="en-US" sz="1100" dirty="0"/>
+            <a:endParaRPr lang="en-US" sz="1050" dirty="0"/>
           </a:p>
         </p:txBody>
       </p:sp>
@@ -4203,8 +4203,8 @@
         </p:nvSpPr>
         <p:spPr>
           <a:xfrm>
-            <a:off x="1051560" y="3803904"/>
-            <a:ext cx="4683100" cy="722376"/>
+            <a:off x="1033272" y="3438144"/>
+            <a:ext cx="4710532" cy="603504"/>
           </a:xfrm>
           <a:prstGeom prst="rect">
             <a:avLst/>
@@ -4246,7 +4246,7 @@
         <p:spPr>
           <a:xfrm>
             <a:off x="6191860" y="1719072"/>
-            <a:ext cx="5368900" cy="868680"/>
+            <a:ext cx="5368900" cy="749808"/>
           </a:xfrm>
           <a:prstGeom prst="rect">
             <a:avLst/>
@@ -4270,8 +4270,8 @@
         </p:nvSpPr>
         <p:spPr>
           <a:xfrm>
-            <a:off x="6329020" y="1883664"/>
-            <a:ext cx="320040" cy="320040"/>
+            <a:off x="6329020" y="1947672"/>
+            <a:ext cx="292608" cy="292608"/>
           </a:xfrm>
           <a:prstGeom prst="rect">
             <a:avLst/>
@@ -4290,8 +4290,8 @@
         </p:nvSpPr>
         <p:spPr>
           <a:xfrm>
-            <a:off x="6329020" y="1883664"/>
-            <a:ext cx="320040" cy="320040"/>
+            <a:off x="6329020" y="1947672"/>
+            <a:ext cx="292608" cy="292608"/>
           </a:xfrm>
           <a:prstGeom prst="rect">
             <a:avLst/>
@@ -4307,7 +4307,7 @@
               <a:buNone/>
             </a:pPr>
             <a:r>
-              <a:rPr lang="en-US" sz="1100" b="1" dirty="0">
+              <a:rPr lang="en-US" sz="1050" b="1" dirty="0">
                 <a:solidFill>
                   <a:srgbClr val="FFFFFF"/>
                 </a:solidFill>
@@ -4317,7 +4317,7 @@
               </a:rPr>
               <a:t>✓</a:t>
             </a:r>
-            <a:endParaRPr lang="en-US" sz="1100" dirty="0"/>
+            <a:endParaRPr lang="en-US" sz="1050" dirty="0"/>
           </a:p>
         </p:txBody>
       </p:sp>
@@ -4329,8 +4329,8 @@
         </p:nvSpPr>
         <p:spPr>
           <a:xfrm>
-            <a:off x="6740500" y="1810512"/>
-            <a:ext cx="4683100" cy="722376"/>
+            <a:off x="6722212" y="1792224"/>
+            <a:ext cx="4710532" cy="603504"/>
           </a:xfrm>
           <a:prstGeom prst="rect">
             <a:avLst/>
@@ -4371,8 +4371,8 @@
         </p:nvSpPr>
         <p:spPr>
           <a:xfrm>
-            <a:off x="6191860" y="2715768"/>
-            <a:ext cx="5368900" cy="868680"/>
+            <a:off x="6191860" y="2542032"/>
+            <a:ext cx="5368900" cy="749808"/>
           </a:xfrm>
           <a:prstGeom prst="rect">
             <a:avLst/>
@@ -4396,8 +4396,8 @@
         </p:nvSpPr>
         <p:spPr>
           <a:xfrm>
-            <a:off x="6329020" y="2880360"/>
-            <a:ext cx="320040" cy="320040"/>
+            <a:off x="6329020" y="2770632"/>
+            <a:ext cx="292608" cy="292608"/>
           </a:xfrm>
           <a:prstGeom prst="rect">
             <a:avLst/>
@@ -4416,8 +4416,8 @@
         </p:nvSpPr>
         <p:spPr>
           <a:xfrm>
-            <a:off x="6329020" y="2880360"/>
-            <a:ext cx="320040" cy="320040"/>
+            <a:off x="6329020" y="2770632"/>
+            <a:ext cx="292608" cy="292608"/>
           </a:xfrm>
           <a:prstGeom prst="rect">
             <a:avLst/>
@@ -4433,7 +4433,7 @@
               <a:buNone/>
             </a:pPr>
             <a:r>
-              <a:rPr lang="en-US" sz="1100" b="1" dirty="0">
+              <a:rPr lang="en-US" sz="1050" b="1" dirty="0">
                 <a:solidFill>
                   <a:srgbClr val="FFFFFF"/>
                 </a:solidFill>
@@ -4443,7 +4443,7 @@
               </a:rPr>
               <a:t>✓</a:t>
             </a:r>
-            <a:endParaRPr lang="en-US" sz="1100" dirty="0"/>
+            <a:endParaRPr lang="en-US" sz="1050" dirty="0"/>
           </a:p>
         </p:txBody>
       </p:sp>
@@ -4455,8 +4455,8 @@
         </p:nvSpPr>
         <p:spPr>
           <a:xfrm>
-            <a:off x="6740500" y="2807208"/>
-            <a:ext cx="4683100" cy="722376"/>
+            <a:off x="6722212" y="2615184"/>
+            <a:ext cx="4710532" cy="603504"/>
           </a:xfrm>
           <a:prstGeom prst="rect">
             <a:avLst/>
@@ -4497,8 +4497,8 @@
         </p:nvSpPr>
         <p:spPr>
           <a:xfrm>
-            <a:off x="6191860" y="3712464"/>
-            <a:ext cx="5368900" cy="868680"/>
+            <a:off x="6191860" y="3364992"/>
+            <a:ext cx="5368900" cy="749808"/>
           </a:xfrm>
           <a:prstGeom prst="rect">
             <a:avLst/>
@@ -4522,8 +4522,8 @@
         </p:nvSpPr>
         <p:spPr>
           <a:xfrm>
-            <a:off x="6329020" y="3877056"/>
-            <a:ext cx="320040" cy="320040"/>
+            <a:off x="6329020" y="3593592"/>
+            <a:ext cx="292608" cy="292608"/>
           </a:xfrm>
           <a:prstGeom prst="rect">
             <a:avLst/>
@@ -4542,8 +4542,8 @@
         </p:nvSpPr>
         <p:spPr>
           <a:xfrm>
-            <a:off x="6329020" y="3877056"/>
-            <a:ext cx="320040" cy="320040"/>
+            <a:off x="6329020" y="3593592"/>
+            <a:ext cx="292608" cy="292608"/>
           </a:xfrm>
           <a:prstGeom prst="rect">
             <a:avLst/>
@@ -4559,7 +4559,7 @@
               <a:buNone/>
             </a:pPr>
             <a:r>
-              <a:rPr lang="en-US" sz="1100" b="1" dirty="0">
+              <a:rPr lang="en-US" sz="1050" b="1" dirty="0">
                 <a:solidFill>
                   <a:srgbClr val="FFFFFF"/>
                 </a:solidFill>
@@ -4569,7 +4569,7 @@
               </a:rPr>
               <a:t>✓</a:t>
             </a:r>
-            <a:endParaRPr lang="en-US" sz="1100" dirty="0"/>
+            <a:endParaRPr lang="en-US" sz="1050" dirty="0"/>
           </a:p>
         </p:txBody>
       </p:sp>
@@ -4581,8 +4581,8 @@
         </p:nvSpPr>
         <p:spPr>
           <a:xfrm>
-            <a:off x="6740500" y="3803904"/>
-            <a:ext cx="4683100" cy="722376"/>
+            <a:off x="6722212" y="3438144"/>
+            <a:ext cx="4710532" cy="603504"/>
           </a:xfrm>
           <a:prstGeom prst="rect">
             <a:avLst/>
@@ -4707,7 +4707,7 @@
                 <a:ea typeface="Pretendard" pitchFamily="34" charset="-122"/>
                 <a:cs typeface="Pretendard" pitchFamily="34" charset="-120"/>
               </a:rPr>
-              <a:t>크리딜   |   </a:t>
+              <a:t>크리딜</a:t>
             </a:r>
             <a:endParaRPr lang="en-US" sz="800" dirty="0"/>
           </a:p>
@@ -5135,7 +5135,7 @@
                 <a:ea typeface="Pretendard" pitchFamily="34" charset="-122"/>
                 <a:cs typeface="Pretendard" pitchFamily="34" charset="-120"/>
               </a:rPr>
-              <a:t>크리딜   |   </a:t>
+              <a:t>크리딜</a:t>
             </a:r>
             <a:endParaRPr lang="en-US" sz="800" dirty="0"/>
           </a:p>
@@ -6638,7 +6638,7 @@
                 <a:ea typeface="Pretendard" pitchFamily="34" charset="-122"/>
                 <a:cs typeface="Pretendard" pitchFamily="34" charset="-120"/>
               </a:rPr>
-              <a:t>크리딜   |   </a:t>
+              <a:t>크리딜</a:t>
             </a:r>
             <a:endParaRPr lang="en-US" sz="800" dirty="0"/>
           </a:p>
@@ -7004,10 +7004,13 @@
           <a:lstStyle/>
           <a:p>
             <a:pPr indent="0" marL="0">
-              <a:buNone/>
-            </a:pPr>
-            <a:r>
-              <a:rPr lang="en-US" sz="1700" b="1" dirty="0">
+              <a:lnSpc>
+                <a:spcPct val="100000"/>
+              </a:lnSpc>
+              <a:buNone/>
+            </a:pPr>
+            <a:r>
+              <a:rPr lang="en-US" sz="2200" b="1" dirty="0">
                 <a:solidFill>
                   <a:srgbClr val="10161F"/>
                 </a:solidFill>
@@ -7017,7 +7020,7 @@
               </a:rPr>
               <a:t>-</a:t>
             </a:r>
-            <a:endParaRPr lang="en-US" sz="1700" dirty="0"/>
+            <a:endParaRPr lang="en-US" sz="2200" dirty="0"/>
           </a:p>
         </p:txBody>
       </p:sp>
@@ -7111,10 +7114,13 @@
           <a:lstStyle/>
           <a:p>
             <a:pPr indent="0" marL="0">
-              <a:buNone/>
-            </a:pPr>
-            <a:r>
-              <a:rPr lang="en-US" sz="1700" b="1" dirty="0">
+              <a:lnSpc>
+                <a:spcPct val="100000"/>
+              </a:lnSpc>
+              <a:buNone/>
+            </a:pPr>
+            <a:r>
+              <a:rPr lang="en-US" sz="2200" b="1" dirty="0">
                 <a:solidFill>
                   <a:srgbClr val="10161F"/>
                 </a:solidFill>
@@ -7124,7 +7130,7 @@
               </a:rPr>
               <a:t>142.5평</a:t>
             </a:r>
-            <a:endParaRPr lang="en-US" sz="1700" dirty="0"/>
+            <a:endParaRPr lang="en-US" sz="2200" dirty="0"/>
           </a:p>
         </p:txBody>
       </p:sp>
@@ -7218,10 +7224,13 @@
           <a:lstStyle/>
           <a:p>
             <a:pPr indent="0" marL="0">
-              <a:buNone/>
-            </a:pPr>
-            <a:r>
-              <a:rPr lang="en-US" sz="1700" b="1" dirty="0">
+              <a:lnSpc>
+                <a:spcPct val="100000"/>
+              </a:lnSpc>
+              <a:buNone/>
+            </a:pPr>
+            <a:r>
+              <a:rPr lang="en-US" sz="2200" b="1" dirty="0">
                 <a:solidFill>
                   <a:srgbClr val="10161F"/>
                 </a:solidFill>
@@ -7231,7 +7240,7 @@
               </a:rPr>
               <a:t>620.8평</a:t>
             </a:r>
-            <a:endParaRPr lang="en-US" sz="1700" dirty="0"/>
+            <a:endParaRPr lang="en-US" sz="2200" dirty="0"/>
           </a:p>
         </p:txBody>
       </p:sp>
@@ -7325,10 +7334,13 @@
           <a:lstStyle/>
           <a:p>
             <a:pPr indent="0" marL="0">
-              <a:buNone/>
-            </a:pPr>
-            <a:r>
-              <a:rPr lang="en-US" sz="1700" b="1" dirty="0">
+              <a:lnSpc>
+                <a:spcPct val="100000"/>
+              </a:lnSpc>
+              <a:buNone/>
+            </a:pPr>
+            <a:r>
+              <a:rPr lang="en-US" sz="2200" b="1" dirty="0">
                 <a:solidFill>
                   <a:srgbClr val="10161F"/>
                 </a:solidFill>
@@ -7338,7 +7350,7 @@
               </a:rPr>
               <a:t>2017년</a:t>
             </a:r>
-            <a:endParaRPr lang="en-US" sz="1700" dirty="0"/>
+            <a:endParaRPr lang="en-US" sz="2200" dirty="0"/>
           </a:p>
         </p:txBody>
       </p:sp>
@@ -7394,7 +7406,7 @@
               <a:buNone/>
             </a:pPr>
             <a:r>
-              <a:rPr lang="en-US" sz="950" dirty="0">
+              <a:rPr lang="en-US" sz="850" dirty="0">
                 <a:solidFill>
                   <a:srgbClr val="718096"/>
                 </a:solidFill>
@@ -7404,7 +7416,7 @@
               </a:rPr>
               <a:t>서초 메디컬 빌딩은 지하2</a:t>
             </a:r>
-            <a:endParaRPr lang="en-US" sz="950" dirty="0"/>
+            <a:endParaRPr lang="en-US" sz="850" dirty="0"/>
           </a:p>
         </p:txBody>
       </p:sp>
@@ -7432,10 +7444,13 @@
           <a:lstStyle/>
           <a:p>
             <a:pPr indent="0" marL="0">
-              <a:buNone/>
-            </a:pPr>
-            <a:r>
-              <a:rPr lang="en-US" sz="1700" b="1" dirty="0">
+              <a:lnSpc>
+                <a:spcPct val="100000"/>
+              </a:lnSpc>
+              <a:buNone/>
+            </a:pPr>
+            <a:r>
+              <a:rPr lang="en-US" sz="2200" b="1" dirty="0">
                 <a:solidFill>
                   <a:srgbClr val="10161F"/>
                 </a:solidFill>
@@ -7445,7 +7460,7 @@
               </a:rPr>
               <a:t>2층</a:t>
             </a:r>
-            <a:endParaRPr lang="en-US" sz="1700" dirty="0"/>
+            <a:endParaRPr lang="en-US" sz="2200" dirty="0"/>
           </a:p>
         </p:txBody>
       </p:sp>
@@ -7501,7 +7516,7 @@
               <a:buNone/>
             </a:pPr>
             <a:r>
-              <a:rPr lang="en-US" sz="950" dirty="0">
+              <a:rPr lang="en-US" sz="850" dirty="0">
                 <a:solidFill>
                   <a:srgbClr val="718096"/>
                 </a:solidFill>
@@ -7511,7 +7526,7 @@
               </a:rPr>
               <a:t>연 수익률(Cap Rate)</a:t>
             </a:r>
-            <a:endParaRPr lang="en-US" sz="950" dirty="0"/>
+            <a:endParaRPr lang="en-US" sz="850" dirty="0"/>
           </a:p>
         </p:txBody>
       </p:sp>
@@ -7539,10 +7554,13 @@
           <a:lstStyle/>
           <a:p>
             <a:pPr indent="0" marL="0">
-              <a:buNone/>
-            </a:pPr>
-            <a:r>
-              <a:rPr lang="en-US" sz="1700" b="1" dirty="0">
+              <a:lnSpc>
+                <a:spcPct val="100000"/>
+              </a:lnSpc>
+              <a:buNone/>
+            </a:pPr>
+            <a:r>
+              <a:rPr lang="en-US" sz="2200" b="1" dirty="0">
                 <a:solidFill>
                   <a:srgbClr val="10161F"/>
                 </a:solidFill>
@@ -7552,7 +7570,7 @@
               </a:rPr>
               <a:t>-</a:t>
             </a:r>
-            <a:endParaRPr lang="en-US" sz="1700" dirty="0"/>
+            <a:endParaRPr lang="en-US" sz="2200" dirty="0"/>
           </a:p>
         </p:txBody>
       </p:sp>
@@ -7646,10 +7664,13 @@
           <a:lstStyle/>
           <a:p>
             <a:pPr indent="0" marL="0">
-              <a:buNone/>
-            </a:pPr>
-            <a:r>
-              <a:rPr lang="en-US" sz="1700" b="1" dirty="0">
+              <a:lnSpc>
+                <a:spcPct val="100000"/>
+              </a:lnSpc>
+              <a:buNone/>
+            </a:pPr>
+            <a:r>
+              <a:rPr lang="en-US" sz="2200" b="1" dirty="0">
                 <a:solidFill>
                   <a:srgbClr val="10161F"/>
                 </a:solidFill>
@@ -7659,7 +7680,7 @@
               </a:rPr>
               <a:t>-</a:t>
             </a:r>
-            <a:endParaRPr lang="en-US" sz="1700" dirty="0"/>
+            <a:endParaRPr lang="en-US" sz="2200" dirty="0"/>
           </a:p>
         </p:txBody>
       </p:sp>
@@ -7753,10 +7774,13 @@
           <a:lstStyle/>
           <a:p>
             <a:pPr indent="0" marL="0">
-              <a:buNone/>
-            </a:pPr>
-            <a:r>
-              <a:rPr lang="en-US" sz="1700" b="1" dirty="0">
+              <a:lnSpc>
+                <a:spcPct val="100000"/>
+              </a:lnSpc>
+              <a:buNone/>
+            </a:pPr>
+            <a:r>
+              <a:rPr lang="en-US" sz="2200" b="1" dirty="0">
                 <a:solidFill>
                   <a:srgbClr val="10161F"/>
                 </a:solidFill>
@@ -7766,7 +7790,7 @@
               </a:rPr>
               <a:t>확인 중</a:t>
             </a:r>
-            <a:endParaRPr lang="en-US" sz="1700" dirty="0"/>
+            <a:endParaRPr lang="en-US" sz="2200" dirty="0"/>
           </a:p>
         </p:txBody>
       </p:sp>
@@ -8238,7 +8262,7 @@
                 <a:ea typeface="Pretendard" pitchFamily="34" charset="-122"/>
                 <a:cs typeface="Pretendard" pitchFamily="34" charset="-120"/>
               </a:rPr>
-              <a:t>크리딜   |   </a:t>
+              <a:t>크리딜</a:t>
             </a:r>
             <a:endParaRPr lang="en-US" sz="800" dirty="0"/>
           </a:p>
@@ -8485,7 +8509,7 @@
         <p:spPr>
           <a:xfrm>
             <a:off x="5989320" y="1481328"/>
-            <a:ext cx="1560003" cy="493776"/>
+            <a:ext cx="1560003" cy="457200"/>
           </a:xfrm>
           <a:prstGeom prst="rect">
             <a:avLst/>
@@ -8504,7 +8528,7 @@
               <a:buNone/>
             </a:pPr>
             <a:r>
-              <a:rPr lang="en-US" sz="1300" dirty="0">
+              <a:rPr lang="en-US" sz="1250" dirty="0">
                 <a:solidFill>
                   <a:srgbClr val="718096"/>
                 </a:solidFill>
@@ -8514,7 +8538,7 @@
               </a:rPr>
               <a:t>대중교통</a:t>
             </a:r>
-            <a:endParaRPr lang="en-US" sz="1300" dirty="0"/>
+            <a:endParaRPr lang="en-US" sz="1250" dirty="0"/>
           </a:p>
         </p:txBody>
       </p:sp>
@@ -8527,7 +8551,7 @@
         <p:spPr>
           <a:xfrm>
             <a:off x="7549323" y="1481328"/>
-            <a:ext cx="4011436" cy="493776"/>
+            <a:ext cx="4011436" cy="457200"/>
           </a:xfrm>
           <a:prstGeom prst="rect">
             <a:avLst/>
@@ -8546,7 +8570,7 @@
               <a:buNone/>
             </a:pPr>
             <a:r>
-              <a:rPr lang="en-US" sz="1300" b="1" dirty="0">
+              <a:rPr lang="en-US" sz="1250" b="1" dirty="0">
                 <a:solidFill>
                   <a:srgbClr val="10161F"/>
                 </a:solidFill>
@@ -8554,9 +8578,9 @@
                 <a:ea typeface="Pretendard" pitchFamily="34" charset="-122"/>
                 <a:cs typeface="Pretendard" pitchFamily="34" charset="-120"/>
               </a:rPr>
-              <a:t>인접 지하철역 역세권 (상세 확인 필요)</a:t>
-            </a:r>
-            <a:endParaRPr lang="en-US" sz="1300" dirty="0"/>
+              <a:t>지하철 및 간선버스 인접</a:t>
+            </a:r>
+            <a:endParaRPr lang="en-US" sz="1250" dirty="0"/>
           </a:p>
         </p:txBody>
       </p:sp>
@@ -8568,7 +8592,7 @@
         </p:nvSpPr>
         <p:spPr>
           <a:xfrm>
-            <a:off x="5989320" y="1975104"/>
+            <a:off x="5989320" y="1938528"/>
             <a:ext cx="5571439" cy="0"/>
           </a:xfrm>
           <a:prstGeom prst="line">
@@ -8591,8 +8615,8 @@
         </p:nvSpPr>
         <p:spPr>
           <a:xfrm>
-            <a:off x="5989320" y="1975104"/>
-            <a:ext cx="1560003" cy="493776"/>
+            <a:off x="5989320" y="1938528"/>
+            <a:ext cx="1560003" cy="457200"/>
           </a:xfrm>
           <a:prstGeom prst="rect">
             <a:avLst/>
@@ -8611,7 +8635,7 @@
               <a:buNone/>
             </a:pPr>
             <a:r>
-              <a:rPr lang="en-US" sz="1300" dirty="0">
+              <a:rPr lang="en-US" sz="1250" dirty="0">
                 <a:solidFill>
                   <a:srgbClr val="718096"/>
                 </a:solidFill>
@@ -8621,7 +8645,7 @@
               </a:rPr>
               <a:t>상권권역</a:t>
             </a:r>
-            <a:endParaRPr lang="en-US" sz="1300" dirty="0"/>
+            <a:endParaRPr lang="en-US" sz="1250" dirty="0"/>
           </a:p>
         </p:txBody>
       </p:sp>
@@ -8633,8 +8657,8 @@
         </p:nvSpPr>
         <p:spPr>
           <a:xfrm>
-            <a:off x="7549323" y="1975104"/>
-            <a:ext cx="4011436" cy="493776"/>
+            <a:off x="7549323" y="1938528"/>
+            <a:ext cx="4011436" cy="457200"/>
           </a:xfrm>
           <a:prstGeom prst="rect">
             <a:avLst/>
@@ -8653,7 +8677,7 @@
               <a:buNone/>
             </a:pPr>
             <a:r>
-              <a:rPr lang="en-US" sz="1300" b="1" dirty="0">
+              <a:rPr lang="en-US" sz="1250" b="1" dirty="0">
                 <a:solidFill>
                   <a:srgbClr val="10161F"/>
                 </a:solidFill>
@@ -8663,7 +8687,7 @@
               </a:rPr>
               <a:t>서초권역 주요 상업·업무 권역</a:t>
             </a:r>
-            <a:endParaRPr lang="en-US" sz="1300" dirty="0"/>
+            <a:endParaRPr lang="en-US" sz="1250" dirty="0"/>
           </a:p>
         </p:txBody>
       </p:sp>
@@ -8675,7 +8699,7 @@
         </p:nvSpPr>
         <p:spPr>
           <a:xfrm>
-            <a:off x="5989320" y="2606040"/>
+            <a:off x="5989320" y="2505456"/>
             <a:ext cx="5571439" cy="658368"/>
           </a:xfrm>
           <a:prstGeom prst="roundRect">
@@ -8697,7 +8721,7 @@
         </p:nvSpPr>
         <p:spPr>
           <a:xfrm>
-            <a:off x="5989320" y="2660904"/>
+            <a:off x="5989320" y="2560320"/>
             <a:ext cx="36576" cy="548640"/>
           </a:xfrm>
           <a:prstGeom prst="rect">
@@ -8717,7 +8741,7 @@
         </p:nvSpPr>
         <p:spPr>
           <a:xfrm>
-            <a:off x="6135624" y="2697480"/>
+            <a:off x="6135624" y="2596896"/>
             <a:ext cx="5315407" cy="201168"/>
           </a:xfrm>
           <a:prstGeom prst="rect">
@@ -8756,7 +8780,7 @@
         </p:nvSpPr>
         <p:spPr>
           <a:xfrm>
-            <a:off x="6135624" y="2898648"/>
+            <a:off x="6135624" y="2798064"/>
             <a:ext cx="5315407" cy="329184"/>
           </a:xfrm>
           <a:prstGeom prst="rect">
@@ -8824,7 +8848,7 @@
                 <a:ea typeface="Pretendard" pitchFamily="34" charset="-122"/>
                 <a:cs typeface="Pretendard" pitchFamily="34" charset="-120"/>
               </a:rPr>
-              <a:t>크리딜   |   </a:t>
+              <a:t>크리딜</a:t>
             </a:r>
             <a:endParaRPr lang="en-US" sz="800" dirty="0"/>
           </a:p>
@@ -9086,7 +9110,7 @@
         <p:spPr>
           <a:xfrm>
             <a:off x="502920" y="1645920"/>
-            <a:ext cx="1920240" cy="420624"/>
+            <a:ext cx="1920240" cy="402336"/>
           </a:xfrm>
           <a:prstGeom prst="rect">
             <a:avLst/>
@@ -9128,7 +9152,7 @@
         <p:spPr>
           <a:xfrm>
             <a:off x="2423160" y="1645920"/>
-            <a:ext cx="4937760" cy="420624"/>
+            <a:ext cx="4937760" cy="402336"/>
           </a:xfrm>
           <a:prstGeom prst="rect">
             <a:avLst/>
@@ -9169,7 +9193,7 @@
         </p:nvSpPr>
         <p:spPr>
           <a:xfrm>
-            <a:off x="502920" y="2066544"/>
+            <a:off x="502920" y="2048256"/>
             <a:ext cx="6858000" cy="0"/>
           </a:xfrm>
           <a:prstGeom prst="line">
@@ -9192,8 +9216,8 @@
         </p:nvSpPr>
         <p:spPr>
           <a:xfrm>
-            <a:off x="502920" y="2066544"/>
-            <a:ext cx="1920240" cy="420624"/>
+            <a:off x="502920" y="2048256"/>
+            <a:ext cx="1920240" cy="402336"/>
           </a:xfrm>
           <a:prstGeom prst="rect">
             <a:avLst/>
@@ -9234,8 +9258,8 @@
         </p:nvSpPr>
         <p:spPr>
           <a:xfrm>
-            <a:off x="2423160" y="2066544"/>
-            <a:ext cx="4937760" cy="420624"/>
+            <a:off x="2423160" y="2048256"/>
+            <a:ext cx="4937760" cy="402336"/>
           </a:xfrm>
           <a:prstGeom prst="rect">
             <a:avLst/>
@@ -9366,7 +9390,7 @@
                 <a:ea typeface="Pretendard" pitchFamily="34" charset="-122"/>
                 <a:cs typeface="Pretendard" pitchFamily="34" charset="-120"/>
               </a:rPr>
-              <a:t>토지 및 건축 규제 포인트</a:t>
+              <a:t>토지 및 건축 규제</a:t>
             </a:r>
             <a:endParaRPr lang="en-US" sz="1050" dirty="0"/>
           </a:p>
@@ -9409,7 +9433,131 @@
                 <a:ea typeface="Pretendard" pitchFamily="34" charset="-122"/>
                 <a:cs typeface="Pretendard" pitchFamily="34" charset="-120"/>
               </a:rPr>
-              <a:t>용도지역·용도지구 기준 건폐율/용적률 상한 확인</a:t>
+              <a:t>토지이용계획 열람 및 건축 규제 확인 필요</a:t>
+            </a:r>
+            <a:endParaRPr lang="en-US" sz="980" dirty="0"/>
+          </a:p>
+        </p:txBody>
+      </p:sp>
+      <p:sp>
+        <p:nvSpPr>
+          <p:cNvPr id="17" name="Shape 15"/>
+          <p:cNvSpPr/>
+          <p:nvPr/>
+        </p:nvSpPr>
+        <p:spPr>
+          <a:xfrm>
+            <a:off x="7720279" y="3977640"/>
+            <a:ext cx="3840480" cy="2148840"/>
+          </a:xfrm>
+          <a:prstGeom prst="roundRect">
+            <a:avLst>
+              <a:gd name="adj" fmla="val 2553"/>
+            </a:avLst>
+          </a:prstGeom>
+          <a:solidFill>
+            <a:srgbClr val="BEE3F8"/>
+          </a:solidFill>
+          <a:ln/>
+        </p:spPr>
+      </p:sp>
+      <p:sp>
+        <p:nvSpPr>
+          <p:cNvPr id="18" name="Shape 16"/>
+          <p:cNvSpPr/>
+          <p:nvPr/>
+        </p:nvSpPr>
+        <p:spPr>
+          <a:xfrm>
+            <a:off x="7720279" y="4032504"/>
+            <a:ext cx="36576" cy="2039112"/>
+          </a:xfrm>
+          <a:prstGeom prst="rect">
+            <a:avLst/>
+          </a:prstGeom>
+          <a:solidFill>
+            <a:srgbClr val="2B6CB0"/>
+          </a:solidFill>
+          <a:ln/>
+        </p:spPr>
+      </p:sp>
+      <p:sp>
+        <p:nvSpPr>
+          <p:cNvPr id="19" name="Text 17"/>
+          <p:cNvSpPr/>
+          <p:nvPr/>
+        </p:nvSpPr>
+        <p:spPr>
+          <a:xfrm>
+            <a:off x="7866583" y="4069080"/>
+            <a:ext cx="3584448" cy="201168"/>
+          </a:xfrm>
+          <a:prstGeom prst="rect">
+            <a:avLst/>
+          </a:prstGeom>
+          <a:noFill/>
+          <a:ln/>
+        </p:spPr>
+        <p:txBody>
+          <a:bodyPr wrap="square" lIns="0" tIns="0" rIns="0" bIns="0" rtlCol="0" anchor="ctr"/>
+          <a:lstStyle/>
+          <a:p>
+            <a:pPr indent="0" marL="0">
+              <a:buNone/>
+            </a:pPr>
+            <a:r>
+              <a:rPr lang="en-US" sz="1050" b="1" dirty="0">
+                <a:solidFill>
+                  <a:srgbClr val="2B6CB0"/>
+                </a:solidFill>
+                <a:latin typeface="Pretendard" pitchFamily="34" charset="0"/>
+                <a:ea typeface="Pretendard" pitchFamily="34" charset="-122"/>
+                <a:cs typeface="Pretendard" pitchFamily="34" charset="-120"/>
+              </a:rPr>
+              <a:t>권리관계 및 공적장부</a:t>
+            </a:r>
+            <a:endParaRPr lang="en-US" sz="1050" dirty="0"/>
+          </a:p>
+        </p:txBody>
+      </p:sp>
+      <p:sp>
+        <p:nvSpPr>
+          <p:cNvPr id="20" name="Text 18"/>
+          <p:cNvSpPr/>
+          <p:nvPr/>
+        </p:nvSpPr>
+        <p:spPr>
+          <a:xfrm>
+            <a:off x="7866583" y="4270248"/>
+            <a:ext cx="3584448" cy="1819656"/>
+          </a:xfrm>
+          <a:prstGeom prst="rect">
+            <a:avLst/>
+          </a:prstGeom>
+          <a:noFill/>
+          <a:ln/>
+        </p:spPr>
+        <p:txBody>
+          <a:bodyPr wrap="square" lIns="0" tIns="0" rIns="0" bIns="0" rtlCol="0" anchor="t"/>
+          <a:lstStyle/>
+          <a:p>
+            <a:pPr marL="342900" indent="-342900">
+              <a:lnSpc>
+                <a:spcPct val="108000"/>
+              </a:lnSpc>
+              <a:buSzPct val="100000"/>
+              <a:buChar char="•"/>
+            </a:pPr>
+            <a:r>
+              <a:rPr lang="en-US" sz="980" dirty="0">
+                <a:solidFill>
+                  <a:srgbClr val="10161F"/>
+                </a:solidFill>
+                <a:latin typeface="Pretendard" pitchFamily="34" charset="0"/>
+                <a:ea typeface="Pretendard" pitchFamily="34" charset="-122"/>
+                <a:cs typeface="Pretendard" pitchFamily="34" charset="-120"/>
+              </a:rPr>
+              <a:t>등기부등본 갑구 소유권 확인</a:t>
             </a:r>
             <a:endParaRPr lang="en-US" sz="980" dirty="0"/>
           </a:p>
@@ -9433,7 +9581,7 @@
                 <a:ea typeface="Pretendard" pitchFamily="34" charset="-122"/>
                 <a:cs typeface="Pretendard" pitchFamily="34" charset="-120"/>
               </a:rPr>
-              <a:t>필지 형상 및 접도 조건에 따른 건축 가능 면적 검토</a:t>
+              <a:t>건축물대장 기재 사항 실물 대조</a:t>
             </a:r>
             <a:endParaRPr lang="en-US" sz="980" dirty="0"/>
           </a:p>
@@ -9457,7 +9605,7 @@
                 <a:ea typeface="Pretendard" pitchFamily="34" charset="-122"/>
                 <a:cs typeface="Pretendard" pitchFamily="34" charset="-120"/>
               </a:rPr>
-              <a:t>토지이용계획 열람 및 개발행위허가 제한 여부 확인</a:t>
+              <a:t>개별공시지가 및 실거래가 비교</a:t>
             </a:r>
             <a:endParaRPr lang="en-US" sz="980" dirty="0"/>
           </a:p>
@@ -9465,56 +9613,14 @@
       </p:sp>
       <p:sp>
         <p:nvSpPr>
-          <p:cNvPr id="17" name="Shape 15"/>
-          <p:cNvSpPr/>
-          <p:nvPr/>
-        </p:nvSpPr>
-        <p:spPr>
-          <a:xfrm>
-            <a:off x="7720279" y="3977640"/>
-            <a:ext cx="3840480" cy="2148840"/>
-          </a:xfrm>
-          <a:prstGeom prst="roundRect">
-            <a:avLst>
-              <a:gd name="adj" fmla="val 2553"/>
-            </a:avLst>
-          </a:prstGeom>
-          <a:solidFill>
-            <a:srgbClr val="BEE3F8"/>
-          </a:solidFill>
-          <a:ln/>
-        </p:spPr>
-      </p:sp>
-      <p:sp>
-        <p:nvSpPr>
-          <p:cNvPr id="18" name="Shape 16"/>
-          <p:cNvSpPr/>
-          <p:nvPr/>
-        </p:nvSpPr>
-        <p:spPr>
-          <a:xfrm>
-            <a:off x="7720279" y="4032504"/>
-            <a:ext cx="36576" cy="2039112"/>
-          </a:xfrm>
-          <a:prstGeom prst="rect">
-            <a:avLst/>
-          </a:prstGeom>
-          <a:solidFill>
-            <a:srgbClr val="2B6CB0"/>
-          </a:solidFill>
-          <a:ln/>
-        </p:spPr>
-      </p:sp>
-      <p:sp>
-        <p:nvSpPr>
-          <p:cNvPr id="19" name="Text 17"/>
-          <p:cNvSpPr/>
-          <p:nvPr/>
-        </p:nvSpPr>
-        <p:spPr>
-          <a:xfrm>
-            <a:off x="7866583" y="4069080"/>
-            <a:ext cx="3584448" cy="201168"/>
+          <p:cNvPr id="21" name="Text 19"/>
+          <p:cNvSpPr/>
+          <p:nvPr/>
+        </p:nvSpPr>
+        <p:spPr>
+          <a:xfrm>
+            <a:off x="502920" y="6382512"/>
+            <a:ext cx="7315200" cy="219456"/>
           </a:xfrm>
           <a:prstGeom prst="rect">
             <a:avLst/>
@@ -9530,145 +9636,15 @@
               <a:buNone/>
             </a:pPr>
             <a:r>
-              <a:rPr lang="en-US" sz="1050" b="1" dirty="0">
-                <a:solidFill>
-                  <a:srgbClr val="2B6CB0"/>
+              <a:rPr lang="en-US" sz="800" dirty="0">
+                <a:solidFill>
+                  <a:srgbClr val="718096"/>
                 </a:solidFill>
                 <a:latin typeface="Pretendard" pitchFamily="34" charset="0"/>
                 <a:ea typeface="Pretendard" pitchFamily="34" charset="-122"/>
                 <a:cs typeface="Pretendard" pitchFamily="34" charset="-120"/>
               </a:rPr>
-              <a:t>권리관계 및 공적장부</a:t>
-            </a:r>
-            <a:endParaRPr lang="en-US" sz="1050" dirty="0"/>
-          </a:p>
-        </p:txBody>
-      </p:sp>
-      <p:sp>
-        <p:nvSpPr>
-          <p:cNvPr id="20" name="Text 18"/>
-          <p:cNvSpPr/>
-          <p:nvPr/>
-        </p:nvSpPr>
-        <p:spPr>
-          <a:xfrm>
-            <a:off x="7866583" y="4270248"/>
-            <a:ext cx="3584448" cy="1819656"/>
-          </a:xfrm>
-          <a:prstGeom prst="rect">
-            <a:avLst/>
-          </a:prstGeom>
-          <a:noFill/>
-          <a:ln/>
-        </p:spPr>
-        <p:txBody>
-          <a:bodyPr wrap="square" lIns="0" tIns="0" rIns="0" bIns="0" rtlCol="0" anchor="t"/>
-          <a:lstStyle/>
-          <a:p>
-            <a:pPr marL="342900" indent="-342900">
-              <a:lnSpc>
-                <a:spcPct val="108000"/>
-              </a:lnSpc>
-              <a:buSzPct val="100000"/>
-              <a:buChar char="•"/>
-            </a:pPr>
-            <a:r>
-              <a:rPr lang="en-US" sz="980" dirty="0">
-                <a:solidFill>
-                  <a:srgbClr val="10161F"/>
-                </a:solidFill>
-                <a:latin typeface="Pretendard" pitchFamily="34" charset="0"/>
-                <a:ea typeface="Pretendard" pitchFamily="34" charset="-122"/>
-                <a:cs typeface="Pretendard" pitchFamily="34" charset="-120"/>
-              </a:rPr>
-              <a:t>등기부등본 갑구 소유권 및 을구 근저당·가압류 확인</a:t>
-            </a:r>
-            <a:endParaRPr lang="en-US" sz="980" dirty="0"/>
-          </a:p>
-          <a:p>
-            <a:pPr marL="342900" indent="-342900">
-              <a:lnSpc>
-                <a:spcPct val="108000"/>
-              </a:lnSpc>
-              <a:spcBef>
-                <a:spcPts val="300"/>
-              </a:spcBef>
-              <a:buSzPct val="100000"/>
-              <a:buChar char="•"/>
-            </a:pPr>
-            <a:r>
-              <a:rPr lang="en-US" sz="980" dirty="0">
-                <a:solidFill>
-                  <a:srgbClr val="10161F"/>
-                </a:solidFill>
-                <a:latin typeface="Pretendard" pitchFamily="34" charset="0"/>
-                <a:ea typeface="Pretendard" pitchFamily="34" charset="-122"/>
-                <a:cs typeface="Pretendard" pitchFamily="34" charset="-120"/>
-              </a:rPr>
-              <a:t>건축물대장 기재 사항과 실물 현황 대조 점검</a:t>
-            </a:r>
-            <a:endParaRPr lang="en-US" sz="980" dirty="0"/>
-          </a:p>
-          <a:p>
-            <a:pPr marL="342900" indent="-342900">
-              <a:lnSpc>
-                <a:spcPct val="108000"/>
-              </a:lnSpc>
-              <a:spcBef>
-                <a:spcPts val="300"/>
-              </a:spcBef>
-              <a:buSzPct val="100000"/>
-              <a:buChar char="•"/>
-            </a:pPr>
-            <a:r>
-              <a:rPr lang="en-US" sz="980" dirty="0">
-                <a:solidFill>
-                  <a:srgbClr val="10161F"/>
-                </a:solidFill>
-                <a:latin typeface="Pretendard" pitchFamily="34" charset="0"/>
-                <a:ea typeface="Pretendard" pitchFamily="34" charset="-122"/>
-                <a:cs typeface="Pretendard" pitchFamily="34" charset="-120"/>
-              </a:rPr>
-              <a:t>개별공시지가 및 실거래가 비교 분석</a:t>
-            </a:r>
-            <a:endParaRPr lang="en-US" sz="980" dirty="0"/>
-          </a:p>
-        </p:txBody>
-      </p:sp>
-      <p:sp>
-        <p:nvSpPr>
-          <p:cNvPr id="21" name="Text 19"/>
-          <p:cNvSpPr/>
-          <p:nvPr/>
-        </p:nvSpPr>
-        <p:spPr>
-          <a:xfrm>
-            <a:off x="502920" y="6382512"/>
-            <a:ext cx="7315200" cy="219456"/>
-          </a:xfrm>
-          <a:prstGeom prst="rect">
-            <a:avLst/>
-          </a:prstGeom>
-          <a:noFill/>
-          <a:ln/>
-        </p:spPr>
-        <p:txBody>
-          <a:bodyPr wrap="square" lIns="0" tIns="0" rIns="0" bIns="0" rtlCol="0" anchor="ctr"/>
-          <a:lstStyle/>
-          <a:p>
-            <a:pPr indent="0" marL="0">
-              <a:buNone/>
-            </a:pPr>
-            <a:r>
-              <a:rPr lang="en-US" sz="800" dirty="0">
-                <a:solidFill>
-                  <a:srgbClr val="718096"/>
-                </a:solidFill>
-                <a:latin typeface="Pretendard" pitchFamily="34" charset="0"/>
-                <a:ea typeface="Pretendard" pitchFamily="34" charset="-122"/>
-                <a:cs typeface="Pretendard" pitchFamily="34" charset="-120"/>
-              </a:rPr>
-              <a:t>크리딜   |   </a:t>
+              <a:t>크리딜</a:t>
             </a:r>
             <a:endParaRPr lang="en-US" sz="800" dirty="0"/>
           </a:p>
@@ -9930,7 +9906,7 @@
         <p:spPr>
           <a:xfrm>
             <a:off x="502920" y="1645920"/>
-            <a:ext cx="1920240" cy="420624"/>
+            <a:ext cx="1920240" cy="402336"/>
           </a:xfrm>
           <a:prstGeom prst="rect">
             <a:avLst/>
@@ -9972,7 +9948,7 @@
         <p:spPr>
           <a:xfrm>
             <a:off x="2423160" y="1645920"/>
-            <a:ext cx="4937760" cy="420624"/>
+            <a:ext cx="4937760" cy="402336"/>
           </a:xfrm>
           <a:prstGeom prst="rect">
             <a:avLst/>
@@ -10013,7 +9989,7 @@
         </p:nvSpPr>
         <p:spPr>
           <a:xfrm>
-            <a:off x="502920" y="2066544"/>
+            <a:off x="502920" y="2048256"/>
             <a:ext cx="6858000" cy="0"/>
           </a:xfrm>
           <a:prstGeom prst="line">
@@ -10036,8 +10012,8 @@
         </p:nvSpPr>
         <p:spPr>
           <a:xfrm>
-            <a:off x="502920" y="2066544"/>
-            <a:ext cx="1920240" cy="420624"/>
+            <a:off x="502920" y="2048256"/>
+            <a:ext cx="1920240" cy="402336"/>
           </a:xfrm>
           <a:prstGeom prst="rect">
             <a:avLst/>
@@ -10078,8 +10054,8 @@
         </p:nvSpPr>
         <p:spPr>
           <a:xfrm>
-            <a:off x="2423160" y="2066544"/>
-            <a:ext cx="4937760" cy="420624"/>
+            <a:off x="2423160" y="2048256"/>
+            <a:ext cx="4937760" cy="402336"/>
           </a:xfrm>
           <a:prstGeom prst="rect">
             <a:avLst/>
@@ -10120,7 +10096,7 @@
         </p:nvSpPr>
         <p:spPr>
           <a:xfrm>
-            <a:off x="502920" y="2487168"/>
+            <a:off x="502920" y="2450592"/>
             <a:ext cx="6858000" cy="0"/>
           </a:xfrm>
           <a:prstGeom prst="line">
@@ -10143,8 +10119,8 @@
         </p:nvSpPr>
         <p:spPr>
           <a:xfrm>
-            <a:off x="502920" y="2487168"/>
-            <a:ext cx="1920240" cy="420624"/>
+            <a:off x="502920" y="2450592"/>
+            <a:ext cx="1920240" cy="402336"/>
           </a:xfrm>
           <a:prstGeom prst="rect">
             <a:avLst/>
@@ -10185,8 +10161,8 @@
         </p:nvSpPr>
         <p:spPr>
           <a:xfrm>
-            <a:off x="2423160" y="2487168"/>
-            <a:ext cx="4937760" cy="420624"/>
+            <a:off x="2423160" y="2450592"/>
+            <a:ext cx="4937760" cy="402336"/>
           </a:xfrm>
           <a:prstGeom prst="rect">
             <a:avLst/>
@@ -10398,7 +10374,7 @@
                 <a:ea typeface="Pretendard" pitchFamily="34" charset="-122"/>
                 <a:cs typeface="Pretendard" pitchFamily="34" charset="-120"/>
               </a:rPr>
-              <a:t>크리딜   |   </a:t>
+              <a:t>크리딜</a:t>
             </a:r>
             <a:endParaRPr lang="en-US" sz="800" dirty="0"/>
           </a:p>
@@ -11499,7 +11475,7 @@
                 <a:ea typeface="Pretendard" pitchFamily="34" charset="-122"/>
                 <a:cs typeface="Pretendard" pitchFamily="34" charset="-120"/>
               </a:rPr>
-              <a:t>크리딜   |   </a:t>
+              <a:t>크리딜</a:t>
             </a:r>
             <a:endParaRPr lang="en-US" sz="800" dirty="0"/>
           </a:p>
@@ -11761,7 +11737,7 @@
         <p:spPr>
           <a:xfrm>
             <a:off x="502920" y="1645920"/>
-            <a:ext cx="1920240" cy="420624"/>
+            <a:ext cx="1920240" cy="402336"/>
           </a:xfrm>
           <a:prstGeom prst="rect">
             <a:avLst/>
@@ -11803,7 +11779,7 @@
         <p:spPr>
           <a:xfrm>
             <a:off x="2423160" y="1645920"/>
-            <a:ext cx="4937760" cy="420624"/>
+            <a:ext cx="4937760" cy="402336"/>
           </a:xfrm>
           <a:prstGeom prst="rect">
             <a:avLst/>
@@ -11844,7 +11820,7 @@
         </p:nvSpPr>
         <p:spPr>
           <a:xfrm>
-            <a:off x="502920" y="2066544"/>
+            <a:off x="502920" y="2048256"/>
             <a:ext cx="6858000" cy="0"/>
           </a:xfrm>
           <a:prstGeom prst="line">
@@ -11867,8 +11843,8 @@
         </p:nvSpPr>
         <p:spPr>
           <a:xfrm>
-            <a:off x="502920" y="2066544"/>
-            <a:ext cx="1920240" cy="420624"/>
+            <a:off x="502920" y="2048256"/>
+            <a:ext cx="1920240" cy="402336"/>
           </a:xfrm>
           <a:prstGeom prst="rect">
             <a:avLst/>
@@ -11909,8 +11885,8 @@
         </p:nvSpPr>
         <p:spPr>
           <a:xfrm>
-            <a:off x="2423160" y="2066544"/>
-            <a:ext cx="4937760" cy="420624"/>
+            <a:off x="2423160" y="2048256"/>
+            <a:ext cx="4937760" cy="402336"/>
           </a:xfrm>
           <a:prstGeom prst="rect">
             <a:avLst/>
@@ -12111,7 +12087,7 @@
                 <a:ea typeface="Pretendard" pitchFamily="34" charset="-122"/>
                 <a:cs typeface="Pretendard" pitchFamily="34" charset="-120"/>
               </a:rPr>
-              <a:t>크리딜   |   </a:t>
+              <a:t>크리딜</a:t>
             </a:r>
             <a:endParaRPr lang="en-US" sz="800" dirty="0"/>
           </a:p>
@@ -12438,6 +12414,9 @@
           <a:lstStyle/>
           <a:p>
             <a:pPr indent="0" marL="0">
+              <a:lnSpc>
+                <a:spcPct val="100000"/>
+              </a:lnSpc>
               <a:buNone/>
             </a:pPr>
             <a:r>
@@ -12545,6 +12524,9 @@
           <a:lstStyle/>
           <a:p>
             <a:pPr indent="0" marL="0">
+              <a:lnSpc>
+                <a:spcPct val="100000"/>
+              </a:lnSpc>
               <a:buNone/>
             </a:pPr>
             <a:r>
@@ -12652,6 +12634,9 @@
           <a:lstStyle/>
           <a:p>
             <a:pPr indent="0" marL="0">
+              <a:lnSpc>
+                <a:spcPct val="100000"/>
+              </a:lnSpc>
               <a:buNone/>
             </a:pPr>
             <a:r>
@@ -12825,7 +12810,7 @@
                 <a:ea typeface="Pretendard" pitchFamily="34" charset="-122"/>
                 <a:cs typeface="Pretendard" pitchFamily="34" charset="-120"/>
               </a:rPr>
-              <a:t>크리딜   |   </a:t>
+              <a:t>크리딜</a:t>
             </a:r>
             <a:endParaRPr lang="en-US" sz="800" dirty="0"/>
           </a:p>
@@ -13183,7 +13168,7 @@
                 <a:ea typeface="Pretendard" pitchFamily="34" charset="-122"/>
                 <a:cs typeface="Pretendard" pitchFamily="34" charset="-120"/>
               </a:rPr>
-              <a:t>165.0억 원</a:t>
+              <a:t>165억 원</a:t>
             </a:r>
             <a:endParaRPr lang="en-US" sz="1150" dirty="0"/>
           </a:p>
@@ -13611,7 +13596,7 @@
                 <a:ea typeface="Pretendard" pitchFamily="34" charset="-122"/>
                 <a:cs typeface="Pretendard" pitchFamily="34" charset="-120"/>
               </a:rPr>
-              <a:t>0.0억 원</a:t>
+              <a:t>-</a:t>
             </a:r>
             <a:endParaRPr lang="en-US" sz="1150" dirty="0"/>
           </a:p>
@@ -14449,7 +14434,7 @@
                           <a:ea typeface="Pretendard" pitchFamily="34" charset="-122"/>
                           <a:cs typeface="Pretendard" pitchFamily="34" charset="-120"/>
                         </a:rPr>
-                        <a:t>0.00%</a:t>
+                        <a:t>-</a:t>
                       </a:r>
                       <a:endParaRPr lang="en-US" sz="1100" dirty="0">
                         <a:latin typeface="Pretendard" charset="0"/>
@@ -14751,7 +14736,7 @@
                           <a:ea typeface="Pretendard" pitchFamily="34" charset="-122"/>
                           <a:cs typeface="Pretendard" pitchFamily="34" charset="-120"/>
                         </a:rPr>
-                        <a:t>0.00%</a:t>
+                        <a:t>-</a:t>
                       </a:r>
                       <a:endParaRPr lang="en-US" sz="1100" dirty="0">
                         <a:latin typeface="Pretendard" charset="0"/>
@@ -15053,7 +15038,7 @@
                           <a:ea typeface="Pretendard" pitchFamily="34" charset="-122"/>
                           <a:cs typeface="Pretendard" pitchFamily="34" charset="-120"/>
                         </a:rPr>
-                        <a:t>0.00%</a:t>
+                        <a:t>-</a:t>
                       </a:r>
                       <a:endParaRPr lang="en-US" sz="1100" dirty="0">
                         <a:latin typeface="Pretendard" charset="0"/>
@@ -15355,7 +15340,7 @@
                           <a:ea typeface="Pretendard" pitchFamily="34" charset="-122"/>
                           <a:cs typeface="Pretendard" pitchFamily="34" charset="-120"/>
                         </a:rPr>
-                        <a:t>0.00%</a:t>
+                        <a:t>-</a:t>
                       </a:r>
                       <a:endParaRPr lang="en-US" sz="1100" dirty="0">
                         <a:latin typeface="Pretendard" charset="0"/>
@@ -15567,7 +15552,7 @@
                 <a:ea typeface="Pretendard" pitchFamily="34" charset="-122"/>
                 <a:cs typeface="Pretendard" pitchFamily="34" charset="-120"/>
               </a:rPr>
-              <a:t>크리딜   |   </a:t>
+              <a:t>크리딜</a:t>
             </a:r>
             <a:endParaRPr lang="en-US" sz="800" dirty="0"/>
           </a:p>

--- a/docs/test/stress/e2e-outputs/income_8photos_pr10.pptx
+++ b/docs/test/stress/e2e-outputs/income_8photos_pr10.pptx
@@ -4105,7 +4105,7 @@
                 <a:ea typeface="Pretendard" pitchFamily="34" charset="-122"/>
                 <a:cs typeface="Pretendard" pitchFamily="34" charset="-120"/>
               </a:rPr>
-              <a:t>임대차 원본 계약서 대조 (보증금, 월임대료, 관리비 실입금 내역 및 제소전화해조서)</a:t>
+              <a:t>임대차 원본 계약서 검토 (보증금, 월임대료, 관리비 실입금 내역 및 제소전화해조서)</a:t>
             </a:r>
             <a:endParaRPr lang="en-US" sz="950" dirty="0"/>
           </a:p>

--- a/docs/test/stress/e2e-outputs/income_8photos_pr10.pptx
+++ b/docs/test/stress/e2e-outputs/income_8photos_pr10.pptx
@@ -2374,10 +2374,15 @@
           <a:ln/>
         </p:spPr>
         <p:txBody>
-          <a:bodyPr wrap="square" lIns="0" tIns="0" rIns="0" bIns="0" rtlCol="0" anchor="ctr"/>
+          <a:bodyPr wrap="square" lIns="0" tIns="0" rIns="0" bIns="0" rtlCol="0" anchor="ctr">
+            <a:normAutofit/>
+          </a:bodyPr>
           <a:lstStyle/>
           <a:p>
             <a:pPr algn="l" indent="0" marL="0">
+              <a:lnSpc>
+                <a:spcPct val="100000"/>
+              </a:lnSpc>
               <a:buNone/>
             </a:pPr>
             <a:r>
@@ -11097,7 +11102,7 @@
               <a:buNone/>
             </a:pPr>
             <a:r>
-              <a:rPr lang="en-US" sz="850" dirty="0">
+              <a:rPr lang="en-US" sz="950" dirty="0">
                 <a:solidFill>
                   <a:srgbClr val="718096"/>
                 </a:solidFill>
@@ -11105,9 +11110,9 @@
                 <a:ea typeface="Pretendard" pitchFamily="34" charset="-122"/>
                 <a:cs typeface="Pretendard" pitchFamily="34" charset="-120"/>
               </a:rPr>
-              <a:t>연 수익률(Cap Rate)</a:t>
-            </a:r>
-            <a:endParaRPr lang="en-US" sz="850" dirty="0"/>
+              <a:t>연 수익률</a:t>
+            </a:r>
+            <a:endParaRPr lang="en-US" sz="950" dirty="0"/>
           </a:p>
         </p:txBody>
       </p:sp>
@@ -11209,7 +11214,7 @@
               <a:buNone/>
             </a:pPr>
             <a:r>
-              <a:rPr lang="en-US" sz="950" dirty="0">
+              <a:rPr lang="en-US" sz="850" dirty="0">
                 <a:solidFill>
                   <a:srgbClr val="718096"/>
                 </a:solidFill>
@@ -11217,9 +11222,9 @@
                 <a:ea typeface="Pretendard" pitchFamily="34" charset="-122"/>
                 <a:cs typeface="Pretendard" pitchFamily="34" charset="-120"/>
               </a:rPr>
-              <a:t>실투자금</a:t>
-            </a:r>
-            <a:endParaRPr lang="en-US" sz="950" dirty="0"/>
+              <a:t>실투자금 (취득비용 포함)</a:t>
+            </a:r>
+            <a:endParaRPr lang="en-US" sz="850" dirty="0"/>
           </a:p>
         </p:txBody>
       </p:sp>
@@ -11369,11 +11374,11 @@
                 <a:solidFill>
                   <a:srgbClr val="10161F"/>
                 </a:solidFill>
-                <a:latin typeface="Pretendard" pitchFamily="34" charset="0"/>
-                <a:ea typeface="Pretendard" pitchFamily="34" charset="-122"/>
-                <a:cs typeface="Pretendard" pitchFamily="34" charset="-120"/>
-              </a:rPr>
-              <a:t>확인 중</a:t>
+                <a:latin typeface="Arial" pitchFamily="34" charset="0"/>
+                <a:ea typeface="Arial" pitchFamily="34" charset="-122"/>
+                <a:cs typeface="Arial" pitchFamily="34" charset="-120"/>
+              </a:rPr>
+              <a:t>-</a:t>
             </a:r>
             <a:endParaRPr lang="en-US" sz="2200" dirty="0"/>
           </a:p>
@@ -11529,7 +11534,9 @@
           <a:ln/>
         </p:spPr>
         <p:txBody>
-          <a:bodyPr wrap="square" lIns="0" tIns="0" rIns="0" bIns="0" rtlCol="0" anchor="ctr"/>
+          <a:bodyPr wrap="square" lIns="0" tIns="0" rIns="0" bIns="0" rtlCol="0" anchor="ctr">
+            <a:normAutofit/>
+          </a:bodyPr>
           <a:lstStyle/>
           <a:p>
             <a:pPr indent="0" marL="0">
@@ -11661,7 +11668,9 @@
           <a:ln/>
         </p:spPr>
         <p:txBody>
-          <a:bodyPr wrap="square" lIns="0" tIns="0" rIns="0" bIns="0" rtlCol="0" anchor="ctr"/>
+          <a:bodyPr wrap="square" lIns="0" tIns="0" rIns="0" bIns="0" rtlCol="0" anchor="ctr">
+            <a:normAutofit/>
+          </a:bodyPr>
           <a:lstStyle/>
           <a:p>
             <a:pPr indent="0" marL="0">
@@ -11676,7 +11685,7 @@
                 <a:ea typeface="Pretendard" pitchFamily="34" charset="-122"/>
                 <a:cs typeface="Pretendard" pitchFamily="34" charset="-120"/>
               </a:rPr>
-              <a:t>자산 규모: 해당 권역 소재 단독 빌딩 매입 기회</a:t>
+              <a:t>안정적 현금흐름: 전 층 임차인 운영 기반의 안정적 월 임대수익 창출</a:t>
             </a:r>
             <a:endParaRPr lang="en-US" sz="1150" dirty="0"/>
           </a:p>
@@ -11793,7 +11802,9 @@
           <a:ln/>
         </p:spPr>
         <p:txBody>
-          <a:bodyPr wrap="square" lIns="0" tIns="0" rIns="0" bIns="0" rtlCol="0" anchor="ctr"/>
+          <a:bodyPr wrap="square" lIns="0" tIns="0" rIns="0" bIns="0" rtlCol="0" anchor="ctr">
+            <a:normAutofit/>
+          </a:bodyPr>
           <a:lstStyle/>
           <a:p>
             <a:pPr indent="0" marL="0">
@@ -11808,7 +11819,7 @@
                 <a:ea typeface="Pretendard" pitchFamily="34" charset="-122"/>
                 <a:cs typeface="Pretendard" pitchFamily="34" charset="-120"/>
               </a:rPr>
-              <a:t>수익 안정성: 안정적 임대수익 기반 투자 매물</a:t>
+              <a:t>자산 규모: 해당 권역 소재 단독 빌딩 매입 기회</a:t>
             </a:r>
             <a:endParaRPr lang="en-US" sz="1150" dirty="0"/>
           </a:p>
@@ -12089,7 +12100,183 @@
       </p:pic>
       <p:sp>
         <p:nvSpPr>
-          <p:cNvPr id="7" name="Text 4"/>
+          <p:cNvPr id="7" name="Shape 4"/>
+          <p:cNvSpPr/>
+          <p:nvPr/>
+        </p:nvSpPr>
+        <p:spPr>
+          <a:xfrm>
+            <a:off x="704088" y="5184648"/>
+            <a:ext cx="3200400" cy="320040"/>
+          </a:xfrm>
+          <a:prstGeom prst="roundRect">
+            <a:avLst>
+              <a:gd name="adj" fmla="val 11429"/>
+            </a:avLst>
+          </a:prstGeom>
+          <a:solidFill>
+            <a:srgbClr val="FFFFFF">
+              <a:alpha val="90000"/>
+            </a:srgbClr>
+          </a:solidFill>
+          <a:ln w="10160">
+            <a:solidFill>
+              <a:srgbClr val="CBD5E1"/>
+            </a:solidFill>
+            <a:prstDash val="solid"/>
+          </a:ln>
+        </p:spPr>
+      </p:sp>
+      <p:sp>
+        <p:nvSpPr>
+          <p:cNvPr id="8" name="Text 5"/>
+          <p:cNvSpPr/>
+          <p:nvPr/>
+        </p:nvSpPr>
+        <p:spPr>
+          <a:xfrm>
+            <a:off x="749808" y="5202936"/>
+            <a:ext cx="3108960" cy="274320"/>
+          </a:xfrm>
+          <a:prstGeom prst="rect">
+            <a:avLst/>
+          </a:prstGeom>
+          <a:noFill/>
+          <a:ln/>
+        </p:spPr>
+        <p:txBody>
+          <a:bodyPr wrap="square" rtlCol="0" anchor="ctr"/>
+          <a:lstStyle/>
+          <a:p>
+            <a:pPr indent="0" marL="0">
+              <a:buNone/>
+            </a:pPr>
+            <a:r>
+              <a:rPr lang="en-US" sz="900" b="1" dirty="0">
+                <a:solidFill>
+                  <a:srgbClr val="B8860B"/>
+                </a:solidFill>
+                <a:latin typeface="Pretendard" pitchFamily="34" charset="0"/>
+                <a:ea typeface="Pretendard" pitchFamily="34" charset="-122"/>
+                <a:cs typeface="Pretendard" pitchFamily="34" charset="-120"/>
+              </a:rPr>
+              <a:t>★ </a:t>
+            </a:r>
+            <a:pPr indent="0" marL="0">
+              <a:buNone/>
+            </a:pPr>
+            <a:r>
+              <a:rPr lang="en-US" sz="850" b="1" dirty="0">
+                <a:solidFill>
+                  <a:srgbClr val="1E293B"/>
+                </a:solidFill>
+                <a:latin typeface="Pretendard" pitchFamily="34" charset="0"/>
+                <a:ea typeface="Pretendard" pitchFamily="34" charset="-122"/>
+                <a:cs typeface="Pretendard" pitchFamily="34" charset="-120"/>
+              </a:rPr>
+              <a:t>대상 자산(본건)   </a:t>
+            </a:r>
+            <a:pPr indent="0" marL="0">
+              <a:buNone/>
+            </a:pPr>
+            <a:r>
+              <a:rPr lang="en-US" sz="1000" b="1" dirty="0">
+                <a:solidFill>
+                  <a:srgbClr val="B8860B"/>
+                </a:solidFill>
+                <a:latin typeface="Pretendard" pitchFamily="34" charset="0"/>
+                <a:ea typeface="Pretendard" pitchFamily="34" charset="-122"/>
+                <a:cs typeface="Pretendard" pitchFamily="34" charset="-120"/>
+              </a:rPr>
+              <a:t>╌ </a:t>
+            </a:r>
+            <a:pPr indent="0" marL="0">
+              <a:buNone/>
+            </a:pPr>
+            <a:r>
+              <a:rPr lang="en-US" sz="850" dirty="0">
+                <a:solidFill>
+                  <a:srgbClr val="475569"/>
+                </a:solidFill>
+                <a:latin typeface="Pretendard" pitchFamily="34" charset="0"/>
+                <a:ea typeface="Pretendard" pitchFamily="34" charset="-122"/>
+                <a:cs typeface="Pretendard" pitchFamily="34" charset="-120"/>
+              </a:rPr>
+              <a:t>도보 5분 반경 (약 400m)</a:t>
+            </a:r>
+            <a:endParaRPr lang="en-US" sz="900" dirty="0"/>
+          </a:p>
+        </p:txBody>
+      </p:sp>
+      <p:sp>
+        <p:nvSpPr>
+          <p:cNvPr id="9" name="Shape 6"/>
+          <p:cNvSpPr/>
+          <p:nvPr/>
+        </p:nvSpPr>
+        <p:spPr>
+          <a:xfrm>
+            <a:off x="2715768" y="3739896"/>
+            <a:ext cx="822960" cy="219456"/>
+          </a:xfrm>
+          <a:prstGeom prst="roundRect">
+            <a:avLst>
+              <a:gd name="adj" fmla="val 16667"/>
+            </a:avLst>
+          </a:prstGeom>
+          <a:solidFill>
+            <a:srgbClr val="132A3A"/>
+          </a:solidFill>
+          <a:ln w="12700">
+            <a:solidFill>
+              <a:srgbClr val="FFFFFF"/>
+            </a:solidFill>
+            <a:prstDash val="solid"/>
+          </a:ln>
+        </p:spPr>
+      </p:sp>
+      <p:sp>
+        <p:nvSpPr>
+          <p:cNvPr id="10" name="Text 7"/>
+          <p:cNvSpPr/>
+          <p:nvPr/>
+        </p:nvSpPr>
+        <p:spPr>
+          <a:xfrm>
+            <a:off x="2715768" y="3739896"/>
+            <a:ext cx="822960" cy="219456"/>
+          </a:xfrm>
+          <a:prstGeom prst="rect">
+            <a:avLst/>
+          </a:prstGeom>
+          <a:noFill/>
+          <a:ln/>
+        </p:spPr>
+        <p:txBody>
+          <a:bodyPr wrap="square" rtlCol="0" anchor="ctr"/>
+          <a:lstStyle/>
+          <a:p>
+            <a:pPr algn="ctr" indent="0" marL="0">
+              <a:buNone/>
+            </a:pPr>
+            <a:r>
+              <a:rPr lang="en-US" sz="900" b="1" dirty="0">
+                <a:solidFill>
+                  <a:srgbClr val="FFFFFF"/>
+                </a:solidFill>
+                <a:latin typeface="Pretendard" pitchFamily="34" charset="0"/>
+                <a:ea typeface="Pretendard" pitchFamily="34" charset="-122"/>
+                <a:cs typeface="Pretendard" pitchFamily="34" charset="-120"/>
+              </a:rPr>
+              <a:t>★ 본건</a:t>
+            </a:r>
+            <a:endParaRPr lang="en-US" sz="900" dirty="0"/>
+          </a:p>
+        </p:txBody>
+      </p:sp>
+      <p:sp>
+        <p:nvSpPr>
+          <p:cNvPr id="11" name="Text 8"/>
           <p:cNvSpPr/>
           <p:nvPr/>
         </p:nvSpPr>
@@ -12133,7 +12320,7 @@
       </p:sp>
       <p:sp>
         <p:nvSpPr>
-          <p:cNvPr id="8" name="Text 5"/>
+          <p:cNvPr id="12" name="Text 9"/>
           <p:cNvSpPr/>
           <p:nvPr/>
         </p:nvSpPr>
@@ -12177,7 +12364,7 @@
       </p:sp>
       <p:sp>
         <p:nvSpPr>
-          <p:cNvPr id="9" name="Shape 6"/>
+          <p:cNvPr id="13" name="Shape 10"/>
           <p:cNvSpPr/>
           <p:nvPr/>
         </p:nvSpPr>
@@ -12200,7 +12387,7 @@
       </p:sp>
       <p:sp>
         <p:nvSpPr>
-          <p:cNvPr id="10" name="Text 7"/>
+          <p:cNvPr id="14" name="Text 11"/>
           <p:cNvSpPr/>
           <p:nvPr/>
         </p:nvSpPr>
@@ -12244,7 +12431,7 @@
       </p:sp>
       <p:sp>
         <p:nvSpPr>
-          <p:cNvPr id="11" name="Text 8"/>
+          <p:cNvPr id="15" name="Text 12"/>
           <p:cNvSpPr/>
           <p:nvPr/>
         </p:nvSpPr>
@@ -12288,7 +12475,7 @@
       </p:sp>
       <p:sp>
         <p:nvSpPr>
-          <p:cNvPr id="12" name="Shape 9"/>
+          <p:cNvPr id="16" name="Shape 13"/>
           <p:cNvSpPr/>
           <p:nvPr/>
         </p:nvSpPr>
@@ -12310,7 +12497,7 @@
       </p:sp>
       <p:sp>
         <p:nvSpPr>
-          <p:cNvPr id="13" name="Shape 10"/>
+          <p:cNvPr id="17" name="Shape 14"/>
           <p:cNvSpPr/>
           <p:nvPr/>
         </p:nvSpPr>
@@ -12330,7 +12517,7 @@
       </p:sp>
       <p:sp>
         <p:nvSpPr>
-          <p:cNvPr id="14" name="Text 11"/>
+          <p:cNvPr id="18" name="Text 15"/>
           <p:cNvSpPr/>
           <p:nvPr/>
         </p:nvSpPr>
@@ -12369,7 +12556,7 @@
       </p:sp>
       <p:sp>
         <p:nvSpPr>
-          <p:cNvPr id="15" name="Text 12"/>
+          <p:cNvPr id="19" name="Text 16"/>
           <p:cNvSpPr/>
           <p:nvPr/>
         </p:nvSpPr>
@@ -12412,7 +12599,7 @@
       </p:sp>
       <p:sp>
         <p:nvSpPr>
-          <p:cNvPr id="16" name="Text 13"/>
+          <p:cNvPr id="20" name="Text 17"/>
           <p:cNvSpPr/>
           <p:nvPr/>
         </p:nvSpPr>
@@ -12451,7 +12638,7 @@
       </p:sp>
       <p:sp>
         <p:nvSpPr>
-          <p:cNvPr id="17" name="Text 14"/>
+          <p:cNvPr id="21" name="Text 18"/>
           <p:cNvSpPr/>
           <p:nvPr/>
         </p:nvSpPr>
@@ -13845,18 +14032,23 @@
         </p:nvSpPr>
         <p:spPr>
           <a:xfrm>
-            <a:off x="7784287" y="4681728"/>
-            <a:ext cx="3840480" cy="1508760"/>
+            <a:off x="7784287" y="3977640"/>
+            <a:ext cx="3840480" cy="777240"/>
           </a:xfrm>
           <a:prstGeom prst="roundRect">
             <a:avLst>
-              <a:gd name="adj" fmla="val 3636"/>
+              <a:gd name="adj" fmla="val 5882"/>
             </a:avLst>
           </a:prstGeom>
           <a:solidFill>
-            <a:srgbClr val="BEE3F8"/>
+            <a:srgbClr val="F6F1E4"/>
           </a:solidFill>
-          <a:ln/>
+          <a:ln w="9525">
+            <a:solidFill>
+              <a:srgbClr val="D4C89A"/>
+            </a:solidFill>
+            <a:prstDash val="solid"/>
+          </a:ln>
         </p:spPr>
       </p:sp>
       <p:sp>
@@ -13867,16 +14059,21 @@
         </p:nvSpPr>
         <p:spPr>
           <a:xfrm>
-            <a:off x="7784287" y="4736592"/>
-            <a:ext cx="36576" cy="1399032"/>
+            <a:off x="7784287" y="4050792"/>
+            <a:ext cx="45720" cy="630936"/>
           </a:xfrm>
           <a:prstGeom prst="rect">
             <a:avLst/>
           </a:prstGeom>
           <a:solidFill>
-            <a:srgbClr val="2B6CB0"/>
+            <a:srgbClr val="B8860B"/>
           </a:solidFill>
-          <a:ln/>
+          <a:ln w="12700">
+            <a:solidFill>
+              <a:srgbClr val="B8860B"/>
+            </a:solidFill>
+            <a:prstDash val="solid"/>
+          </a:ln>
         </p:spPr>
       </p:sp>
       <p:sp>
@@ -13887,8 +14084,8 @@
         </p:nvSpPr>
         <p:spPr>
           <a:xfrm>
-            <a:off x="7930591" y="4773168"/>
-            <a:ext cx="3584448" cy="201168"/>
+            <a:off x="7967167" y="4087368"/>
+            <a:ext cx="3547872" cy="237744"/>
           </a:xfrm>
           <a:prstGeom prst="rect">
             <a:avLst/>
@@ -13904,9 +14101,9 @@
               <a:buNone/>
             </a:pPr>
             <a:r>
-              <a:rPr lang="en-US" sz="1050" b="1" dirty="0">
-                <a:solidFill>
-                  <a:srgbClr val="2B6CB0"/>
+              <a:rPr lang="en-US" sz="1100" b="1" dirty="0">
+                <a:solidFill>
+                  <a:srgbClr val="977024"/>
                 </a:solidFill>
                 <a:latin typeface="Pretendard" pitchFamily="34" charset="0"/>
                 <a:ea typeface="Pretendard" pitchFamily="34" charset="-122"/>
@@ -13914,39 +14111,63 @@
               </a:rPr>
               <a:t>자산 하이라이트</a:t>
             </a:r>
-            <a:endParaRPr lang="en-US" sz="1050" dirty="0"/>
-          </a:p>
-        </p:txBody>
-      </p:sp>
-      <p:sp>
-        <p:nvSpPr>
-          <p:cNvPr id="19" name="Text 17"/>
-          <p:cNvSpPr/>
-          <p:nvPr/>
-        </p:nvSpPr>
-        <p:spPr>
-          <a:xfrm>
-            <a:off x="7930591" y="4974336"/>
-            <a:ext cx="3584448" cy="1179576"/>
-          </a:xfrm>
-          <a:prstGeom prst="rect">
-            <a:avLst/>
-          </a:prstGeom>
-          <a:noFill/>
-          <a:ln/>
-        </p:spPr>
-        <p:txBody>
-          <a:bodyPr wrap="square" lIns="0" tIns="0" rIns="0" bIns="0" rtlCol="0" anchor="t"/>
+            <a:endParaRPr lang="en-US" sz="1100" dirty="0"/>
+          </a:p>
+        </p:txBody>
+      </p:sp>
+      <p:sp>
+        <p:nvSpPr>
+          <p:cNvPr id="19" name="Shape 17"/>
+          <p:cNvSpPr/>
+          <p:nvPr/>
+        </p:nvSpPr>
+        <p:spPr>
+          <a:xfrm>
+            <a:off x="7985455" y="4503420"/>
+            <a:ext cx="54864" cy="54864"/>
+          </a:xfrm>
+          <a:prstGeom prst="rect">
+            <a:avLst/>
+          </a:prstGeom>
+          <a:solidFill>
+            <a:srgbClr val="B8860B"/>
+          </a:solidFill>
+          <a:ln w="12700">
+            <a:solidFill>
+              <a:srgbClr val="B8860B"/>
+            </a:solidFill>
+            <a:prstDash val="solid"/>
+          </a:ln>
+        </p:spPr>
+      </p:sp>
+      <p:sp>
+        <p:nvSpPr>
+          <p:cNvPr id="20" name="Text 18"/>
+          <p:cNvSpPr/>
+          <p:nvPr/>
+        </p:nvSpPr>
+        <p:spPr>
+          <a:xfrm>
+            <a:off x="8113471" y="4398264"/>
+            <a:ext cx="3383280" cy="265176"/>
+          </a:xfrm>
+          <a:prstGeom prst="rect">
+            <a:avLst/>
+          </a:prstGeom>
+          <a:noFill/>
+          <a:ln/>
+        </p:spPr>
+        <p:txBody>
+          <a:bodyPr wrap="square" lIns="0" tIns="0" rIns="0" bIns="0" rtlCol="0" anchor="ctr">
+            <a:normAutofit/>
+          </a:bodyPr>
           <a:lstStyle/>
           <a:p>
             <a:pPr indent="0" marL="0">
-              <a:lnSpc>
-                <a:spcPct val="108000"/>
-              </a:lnSpc>
-              <a:buNone/>
-            </a:pPr>
-            <a:r>
-              <a:rPr lang="en-US" sz="980" dirty="0">
+              <a:buNone/>
+            </a:pPr>
+            <a:r>
+              <a:rPr lang="en-US" sz="900" dirty="0">
                 <a:solidFill>
                   <a:srgbClr val="10161F"/>
                 </a:solidFill>
@@ -13956,13 +14177,13 @@
               </a:rPr>
               <a:t>서초 메디컬 빌딩은 지하2층~지상7층 규모의 올근생 빌딩입니다.</a:t>
             </a:r>
-            <a:endParaRPr lang="en-US" sz="980" dirty="0"/>
-          </a:p>
-        </p:txBody>
-      </p:sp>
-      <p:sp>
-        <p:nvSpPr>
-          <p:cNvPr id="20" name="Text 18"/>
+            <a:endParaRPr lang="en-US" sz="900" dirty="0"/>
+          </a:p>
+        </p:txBody>
+      </p:sp>
+      <p:sp>
+        <p:nvSpPr>
+          <p:cNvPr id="21" name="Text 19"/>
           <p:cNvSpPr/>
           <p:nvPr/>
         </p:nvSpPr>
@@ -14001,7 +14222,7 @@
       </p:sp>
       <p:sp>
         <p:nvSpPr>
-          <p:cNvPr id="21" name="Text 19"/>
+          <p:cNvPr id="22" name="Text 20"/>
           <p:cNvSpPr/>
           <p:nvPr/>
         </p:nvSpPr>
